--- a/knf/decks/d1p4.pptx
+++ b/knf/decks/d1p4.pptx
@@ -4589,7 +4589,7 @@
                 <a:ea typeface="Pretendard"/>
                 <a:cs typeface="Pretendard"/>
               </a:rPr>
-              <a:t>45분 뒤에는</a:t>
+              <a:t>50분 뒤에는</a:t>
             </a:r>
           </a:p>
         </p:txBody>

--- a/knf/decks/d1p4.pptx
+++ b/knf/decks/d1p4.pptx
@@ -3099,7 +3099,7 @@
       <p:grpSpPr/>
       <p:sp>
         <p:nvSpPr>
-          <p:cNvPr id="2" name="Oval 1"/>
+          <p:cNvPr id="2" name="deckgen:decor"/>
           <p:cNvSpPr/>
           <p:nvPr/>
         </p:nvSpPr>
@@ -3129,7 +3129,7 @@
       </p:sp>
       <p:sp>
         <p:nvSpPr>
-          <p:cNvPr id="3" name="Oval 2"/>
+          <p:cNvPr id="3" name="deckgen:decor"/>
           <p:cNvSpPr/>
           <p:nvPr/>
         </p:nvSpPr>
@@ -3159,7 +3159,7 @@
       </p:sp>
       <p:sp>
         <p:nvSpPr>
-          <p:cNvPr id="4" name="Oval 3"/>
+          <p:cNvPr id="4" name="deckgen:decor"/>
           <p:cNvSpPr/>
           <p:nvPr/>
         </p:nvSpPr>
@@ -3189,7 +3189,7 @@
       </p:sp>
       <p:sp>
         <p:nvSpPr>
-          <p:cNvPr id="5" name="Rectangle 4"/>
+          <p:cNvPr id="5" name="deckgen:decor"/>
           <p:cNvSpPr/>
           <p:nvPr/>
         </p:nvSpPr>
@@ -3219,7 +3219,7 @@
       </p:sp>
       <p:sp>
         <p:nvSpPr>
-          <p:cNvPr id="6" name="Oval 5"/>
+          <p:cNvPr id="6" name="deckgen:decor"/>
           <p:cNvSpPr/>
           <p:nvPr/>
         </p:nvSpPr>
@@ -3249,7 +3249,7 @@
       </p:sp>
       <p:sp>
         <p:nvSpPr>
-          <p:cNvPr id="7" name="Oval 6"/>
+          <p:cNvPr id="7" name="deckgen:decor"/>
           <p:cNvSpPr/>
           <p:nvPr/>
         </p:nvSpPr>
@@ -3279,7 +3279,7 @@
       </p:sp>
       <p:sp>
         <p:nvSpPr>
-          <p:cNvPr id="8" name="Oval 7"/>
+          <p:cNvPr id="8" name="deckgen:decor"/>
           <p:cNvSpPr/>
           <p:nvPr/>
         </p:nvSpPr>
@@ -3309,7 +3309,7 @@
       </p:sp>
       <p:sp>
         <p:nvSpPr>
-          <p:cNvPr id="9" name="Oval 8"/>
+          <p:cNvPr id="9" name="deckgen:decor"/>
           <p:cNvSpPr/>
           <p:nvPr/>
         </p:nvSpPr>
@@ -3339,7 +3339,7 @@
       </p:sp>
       <p:sp>
         <p:nvSpPr>
-          <p:cNvPr id="10" name="Rectangle 9"/>
+          <p:cNvPr id="10" name="deckgen:decor"/>
           <p:cNvSpPr/>
           <p:nvPr/>
         </p:nvSpPr>
@@ -3617,7 +3617,7 @@
       <p:grpSpPr/>
       <p:sp>
         <p:nvSpPr>
-          <p:cNvPr id="2" name="Oval 1"/>
+          <p:cNvPr id="2" name="deckgen:decor"/>
           <p:cNvSpPr/>
           <p:nvPr/>
         </p:nvSpPr>
@@ -3647,7 +3647,7 @@
       </p:sp>
       <p:sp>
         <p:nvSpPr>
-          <p:cNvPr id="3" name="Oval 2"/>
+          <p:cNvPr id="3" name="deckgen:decor"/>
           <p:cNvSpPr/>
           <p:nvPr/>
         </p:nvSpPr>
@@ -4424,7 +4424,7 @@
       <p:grpSpPr/>
       <p:sp>
         <p:nvSpPr>
-          <p:cNvPr id="2" name="Oval 1"/>
+          <p:cNvPr id="2" name="deckgen:decor"/>
           <p:cNvSpPr/>
           <p:nvPr/>
         </p:nvSpPr>
@@ -4454,7 +4454,7 @@
       </p:sp>
       <p:sp>
         <p:nvSpPr>
-          <p:cNvPr id="3" name="Oval 2"/>
+          <p:cNvPr id="3" name="deckgen:decor"/>
           <p:cNvSpPr/>
           <p:nvPr/>
         </p:nvSpPr>
@@ -4484,7 +4484,7 @@
       </p:sp>
       <p:sp>
         <p:nvSpPr>
-          <p:cNvPr id="4" name="Oval 3"/>
+          <p:cNvPr id="4" name="deckgen:decor"/>
           <p:cNvSpPr/>
           <p:nvPr/>
         </p:nvSpPr>
@@ -5269,7 +5269,7 @@
       <p:grpSpPr/>
       <p:sp>
         <p:nvSpPr>
-          <p:cNvPr id="2" name="Oval 1"/>
+          <p:cNvPr id="2" name="deckgen:decor"/>
           <p:cNvSpPr/>
           <p:nvPr/>
         </p:nvSpPr>
@@ -5299,7 +5299,7 @@
       </p:sp>
       <p:sp>
         <p:nvSpPr>
-          <p:cNvPr id="3" name="Oval 2"/>
+          <p:cNvPr id="3" name="deckgen:decor"/>
           <p:cNvSpPr/>
           <p:nvPr/>
         </p:nvSpPr>
@@ -5329,7 +5329,7 @@
       </p:sp>
       <p:sp>
         <p:nvSpPr>
-          <p:cNvPr id="4" name="Oval 3"/>
+          <p:cNvPr id="4" name="deckgen:decor"/>
           <p:cNvSpPr/>
           <p:nvPr/>
         </p:nvSpPr>
@@ -6188,7 +6188,7 @@
       <p:grpSpPr/>
       <p:sp>
         <p:nvSpPr>
-          <p:cNvPr id="2" name="Oval 1"/>
+          <p:cNvPr id="2" name="deckgen:decor"/>
           <p:cNvSpPr/>
           <p:nvPr/>
         </p:nvSpPr>
@@ -6218,7 +6218,7 @@
       </p:sp>
       <p:sp>
         <p:nvSpPr>
-          <p:cNvPr id="3" name="Oval 2"/>
+          <p:cNvPr id="3" name="deckgen:decor"/>
           <p:cNvSpPr/>
           <p:nvPr/>
         </p:nvSpPr>
@@ -6248,7 +6248,7 @@
       </p:sp>
       <p:sp>
         <p:nvSpPr>
-          <p:cNvPr id="4" name="Oval 3"/>
+          <p:cNvPr id="4" name="deckgen:decor"/>
           <p:cNvSpPr/>
           <p:nvPr/>
         </p:nvSpPr>
@@ -8124,7 +8124,7 @@
       <p:grpSpPr/>
       <p:sp>
         <p:nvSpPr>
-          <p:cNvPr id="2" name="Oval 1"/>
+          <p:cNvPr id="2" name="deckgen:decor"/>
           <p:cNvSpPr/>
           <p:nvPr/>
         </p:nvSpPr>
@@ -8154,7 +8154,7 @@
       </p:sp>
       <p:sp>
         <p:nvSpPr>
-          <p:cNvPr id="3" name="Oval 2"/>
+          <p:cNvPr id="3" name="deckgen:decor"/>
           <p:cNvSpPr/>
           <p:nvPr/>
         </p:nvSpPr>
@@ -8184,7 +8184,7 @@
       </p:sp>
       <p:sp>
         <p:nvSpPr>
-          <p:cNvPr id="4" name="Oval 3"/>
+          <p:cNvPr id="4" name="deckgen:decor"/>
           <p:cNvSpPr/>
           <p:nvPr/>
         </p:nvSpPr>
@@ -9835,7 +9835,7 @@
       <p:grpSpPr/>
       <p:sp>
         <p:nvSpPr>
-          <p:cNvPr id="2" name="Oval 1"/>
+          <p:cNvPr id="2" name="deckgen:decor"/>
           <p:cNvSpPr/>
           <p:nvPr/>
         </p:nvSpPr>
@@ -9865,7 +9865,7 @@
       </p:sp>
       <p:sp>
         <p:nvSpPr>
-          <p:cNvPr id="3" name="Oval 2"/>
+          <p:cNvPr id="3" name="deckgen:decor"/>
           <p:cNvSpPr/>
           <p:nvPr/>
         </p:nvSpPr>
@@ -9895,7 +9895,7 @@
       </p:sp>
       <p:sp>
         <p:nvSpPr>
-          <p:cNvPr id="4" name="Oval 3"/>
+          <p:cNvPr id="4" name="deckgen:decor"/>
           <p:cNvSpPr/>
           <p:nvPr/>
         </p:nvSpPr>
@@ -10101,7 +10101,7 @@
       </p:sp>
       <p:sp>
         <p:nvSpPr>
-          <p:cNvPr id="10" name="TextBox 9"/>
+          <p:cNvPr id="10" name="deckgen:ornament"/>
           <p:cNvSpPr txBox="1"/>
           <p:nvPr/>
         </p:nvSpPr>
@@ -10286,7 +10286,7 @@
       </p:sp>
       <p:sp>
         <p:nvSpPr>
-          <p:cNvPr id="14" name="TextBox 13"/>
+          <p:cNvPr id="14" name="deckgen:ornament"/>
           <p:cNvSpPr txBox="1"/>
           <p:nvPr/>
         </p:nvSpPr>
@@ -10471,7 +10471,7 @@
       </p:sp>
       <p:sp>
         <p:nvSpPr>
-          <p:cNvPr id="18" name="TextBox 17"/>
+          <p:cNvPr id="18" name="deckgen:ornament"/>
           <p:cNvSpPr txBox="1"/>
           <p:nvPr/>
         </p:nvSpPr>
@@ -10793,7 +10793,7 @@
       <p:grpSpPr/>
       <p:sp>
         <p:nvSpPr>
-          <p:cNvPr id="2" name="Oval 1"/>
+          <p:cNvPr id="2" name="deckgen:decor"/>
           <p:cNvSpPr/>
           <p:nvPr/>
         </p:nvSpPr>
@@ -10823,7 +10823,7 @@
       </p:sp>
       <p:sp>
         <p:nvSpPr>
-          <p:cNvPr id="3" name="Oval 2"/>
+          <p:cNvPr id="3" name="deckgen:decor"/>
           <p:cNvSpPr/>
           <p:nvPr/>
         </p:nvSpPr>
@@ -10853,7 +10853,7 @@
       </p:sp>
       <p:sp>
         <p:nvSpPr>
-          <p:cNvPr id="4" name="Oval 3"/>
+          <p:cNvPr id="4" name="deckgen:decor"/>
           <p:cNvSpPr/>
           <p:nvPr/>
         </p:nvSpPr>
@@ -11896,7 +11896,7 @@
       <p:grpSpPr/>
       <p:sp>
         <p:nvSpPr>
-          <p:cNvPr id="2" name="Oval 1"/>
+          <p:cNvPr id="2" name="deckgen:decor"/>
           <p:cNvSpPr/>
           <p:nvPr/>
         </p:nvSpPr>
@@ -11926,7 +11926,7 @@
       </p:sp>
       <p:sp>
         <p:nvSpPr>
-          <p:cNvPr id="3" name="Oval 2"/>
+          <p:cNvPr id="3" name="deckgen:decor"/>
           <p:cNvSpPr/>
           <p:nvPr/>
         </p:nvSpPr>
@@ -11956,7 +11956,7 @@
       </p:sp>
       <p:sp>
         <p:nvSpPr>
-          <p:cNvPr id="4" name="Oval 3"/>
+          <p:cNvPr id="4" name="deckgen:decor"/>
           <p:cNvSpPr/>
           <p:nvPr/>
         </p:nvSpPr>
@@ -13011,7 +13011,7 @@
       <p:grpSpPr/>
       <p:sp>
         <p:nvSpPr>
-          <p:cNvPr id="2" name="Oval 1"/>
+          <p:cNvPr id="2" name="deckgen:decor"/>
           <p:cNvSpPr/>
           <p:nvPr/>
         </p:nvSpPr>
@@ -13041,7 +13041,7 @@
       </p:sp>
       <p:sp>
         <p:nvSpPr>
-          <p:cNvPr id="3" name="Oval 2"/>
+          <p:cNvPr id="3" name="deckgen:decor"/>
           <p:cNvSpPr/>
           <p:nvPr/>
         </p:nvSpPr>
@@ -13071,7 +13071,7 @@
       </p:sp>
       <p:sp>
         <p:nvSpPr>
-          <p:cNvPr id="4" name="Oval 3"/>
+          <p:cNvPr id="4" name="deckgen:decor"/>
           <p:cNvSpPr/>
           <p:nvPr/>
         </p:nvSpPr>
